--- a/public/materialy/1L/7/Prezentace k hodinám/2. Hesla a dvoufaktorové ověření.pptx
+++ b/public/materialy/1L/7/Prezentace k hodinám/2. Hesla a dvoufaktorové ověření.pptx
@@ -548,7 +548,7 @@
           </a:p>
           <a:p xmlns:a="http://schemas.openxmlformats.org/drawingml/2006/main">
             <a:r>
-              <a:t>Soubory: Digitální pracovní sešit, 02_ucty_a_faktory.csv</a:t>
+              <a:t>Soubory: Digitální pracovní sešit, 2. Účty a faktory ověření.csv</a:t>
             </a:r>
           </a:p>
           <a:p xmlns:a="http://schemas.openxmlformats.org/drawingml/2006/main">
@@ -808,7 +808,7 @@
           <a:lstStyle xmlns:a="http://schemas.openxmlformats.org/drawingml/2006/main"/>
           <a:p xmlns:a="http://schemas.openxmlformats.org/drawingml/2006/main">
             <a:r>
-              <a:t>Hlavní aktivita využívá: Digitální pracovní sešit, 02_ucty_a_faktory.csv</a:t>
+              <a:t>Hlavní aktivita využívá: Digitální pracovní sešit, 2. Účty a faktory ověření.csv</a:t>
             </a:r>
           </a:p>
           <a:p xmlns:a="http://schemas.openxmlformats.org/drawingml/2006/main">
@@ -3674,7 +3674,7 @@
               </a:defRPr>
             </a:pPr>
             <a:r>
-              <a:t>Digitální pracovní sešit, 02_ucty_a_faktory.csv</a:t>
+              <a:t>Digitální pracovní sešit, 2. Účty a faktory ověření.csv</a:t>
             </a:r>
           </a:p>
         </p:txBody>

--- a/public/materialy/1L/7/Prezentace k hodinám/2. Hesla a dvoufaktorové ověření.pptx
+++ b/public/materialy/1L/7/Prezentace k hodinám/2. Hesla a dvoufaktorové ověření.pptx
@@ -558,7 +558,7 @@
           </a:p>
           <a:p xmlns:a="http://schemas.openxmlformats.org/drawingml/2006/main">
             <a:r>
-              <a:t>Před otevřením dalšího snímku stručně uveďte téma a nechte studenty připravit pracovní soubory.</a:t>
+              <a:t>Před otevřením dalšího snímku stručně uveď téma a nech studenty připravit pracovní soubory.</a:t>
             </a:r>
           </a:p>
         </p:txBody>
@@ -638,7 +638,7 @@
           </a:p>
           <a:p xmlns:a="http://schemas.openxmlformats.org/drawingml/2006/main">
             <a:r>
-              <a:t>Postup učitele: Ptejte se, které další účty ohrozí jedno opakované heslo.</a:t>
+              <a:t>Postup učitele: Ptej se, které další účty ohrozí jedno opakované heslo.</a:t>
             </a:r>
           </a:p>
           <a:p xmlns:a="http://schemas.openxmlformats.org/drawingml/2006/main">
@@ -648,7 +648,7 @@
           </a:p>
           <a:p xmlns:a="http://schemas.openxmlformats.org/drawingml/2006/main">
             <a:r>
-              <a:t>Neprozrazujte správnou odpověď. Cílem je zachytit počáteční úsudek, ke kterému se třída vrátí při reflexi.</a:t>
+              <a:t>Neprozrazuj správnou odpověď. Cílem je zachytit počáteční úsudek, ke kterému se třída vrátí při reflexi.</a:t>
             </a:r>
           </a:p>
         </p:txBody>
@@ -728,7 +728,7 @@
           </a:p>
           <a:p xmlns:a="http://schemas.openxmlformats.org/drawingml/2006/main">
             <a:r>
-              <a:t>Postup učitele: Zdůrazněte délku, jedinečnost a nepředvídatelnost.</a:t>
+              <a:t>Postup učitele: Zdůrazni délku, jedinečnost a nepředvídatelnost.</a:t>
             </a:r>
           </a:p>
           <a:p xmlns:a="http://schemas.openxmlformats.org/drawingml/2006/main">
@@ -738,7 +738,7 @@
           </a:p>
           <a:p xmlns:a="http://schemas.openxmlformats.org/drawingml/2006/main">
             <a:r>
-              <a:t>Nechte studenty doplnit příklad ke každému bodu. Přechod k aktivitě proveďte otázkou: Jak tyto tři body použijeme na dnešní soubor?</a:t>
+              <a:t>Nech studenty doplnit příklad ke každému bodu. Přechod k aktivitě proveď otázkou: Jak tyto tři body použijeme na dnešní soubor?</a:t>
             </a:r>
           </a:p>
         </p:txBody>
@@ -813,7 +813,7 @@
           </a:p>
           <a:p xmlns:a="http://schemas.openxmlformats.org/drawingml/2006/main">
             <a:r>
-              <a:t>12–22 min – Posouzení modelových hesel: Nehodnoťte heslo pouze podle přítomnosti speciálního znaku.</a:t>
+              <a:t>12–22 min – Posouzení modelových hesel: Nehodnoť heslo pouze podle přítomnosti speciálního znaku.</a:t>
             </a:r>
           </a:p>
           <a:p xmlns:a="http://schemas.openxmlformats.org/drawingml/2006/main">
@@ -823,7 +823,7 @@
           </a:p>
           <a:p xmlns:a="http://schemas.openxmlformats.org/drawingml/2006/main">
             <a:r>
-              <a:t>32–41 min – Návrh ochrany tří účtů: Požadujte přihlášení, druhý faktor i způsob obnovy.</a:t>
+              <a:t>32–41 min – Návrh ochrany tří účtů: Požaduj přihlášení, druhý faktor i způsob obnovy.</a:t>
             </a:r>
           </a:p>
           <a:p xmlns:a="http://schemas.openxmlformats.org/drawingml/2006/main">
@@ -833,7 +833,7 @@
           </a:p>
           <a:p xmlns:a="http://schemas.openxmlformats.org/drawingml/2006/main">
             <a:r>
-              <a:t>Během práce nepřebírejte myš za studenta. Pomáhejte otázkami z dalšího snímku a žádejte, aby každé rozhodnutí opřel o konkrétní znak nebo zdroj.</a:t>
+              <a:t>Během práce nepřebírej myš za studenta. Pomáhej otázkami z dalšího snímku a žádej, aby každé rozhodnutí opřel o konkrétní znak nebo zdroj.</a:t>
             </a:r>
           </a:p>
         </p:txBody>
@@ -913,17 +913,17 @@
           </a:p>
           <a:p xmlns:a="http://schemas.openxmlformats.org/drawingml/2006/main">
             <a:r>
-              <a:t>Podpora: Nabídněte kartičky s nadpisy znám, mám a jsem; student pouze přesouvá připravené příklady.</a:t>
-            </a:r>
-          </a:p>
-          <a:p xmlns:a="http://schemas.openxmlformats.org/drawingml/2006/main">
-            <a:r>
-              <a:t>Rozšíření: Porovnejte SMS kód, autentizační aplikaci a bezpečnostní klíč z hlediska pohodlí, obnovy a odolnosti proti phishingu.</a:t>
-            </a:r>
-          </a:p>
-          <a:p xmlns:a="http://schemas.openxmlformats.org/drawingml/2006/main">
-            <a:r>
-              <a:t>Pro rychlou mezikontrolu nechte dvojice vyměnit výstup a označit jeden dobře doložený bod a jednu otázku, která ještě zůstává.</a:t>
+              <a:t>Podpora: Nabídni kartičky s nadpisy znám, mám a jsem; student pouze přesouvá připravené příklady.</a:t>
+            </a:r>
+          </a:p>
+          <a:p xmlns:a="http://schemas.openxmlformats.org/drawingml/2006/main">
+            <a:r>
+              <a:t>Rozšíření: Porovnej SMS kód, autentizační aplikaci a bezpečnostní klíč z hlediska pohodlí, obnovy a odolnosti proti phishingu.</a:t>
+            </a:r>
+          </a:p>
+          <a:p xmlns:a="http://schemas.openxmlformats.org/drawingml/2006/main">
+            <a:r>
+              <a:t>Pro rychlou mezikontrolu nech dvojice vyměnit výstup a označit jeden dobře doložený bod a jednu otázku, která ještě zůstává.</a:t>
             </a:r>
           </a:p>
         </p:txBody>
@@ -1003,7 +1003,7 @@
           </a:p>
           <a:p xmlns:a="http://schemas.openxmlformats.org/drawingml/2006/main">
             <a:r>
-              <a:t>Nečtěte celý klíč. Vyberte dva studentské postupy, které vedou k odlišným závěrům, a nechte třídu určit, který je lépe podložený.</a:t>
+              <a:t>Nečti celý klíč. Vyber dva studentské postupy, které vedou k odlišným závěrům, a nech třídu určit, který je lépe podložený.</a:t>
             </a:r>
           </a:p>
         </p:txBody>
@@ -1078,12 +1078,12 @@
           </a:p>
           <a:p xmlns:a="http://schemas.openxmlformats.org/drawingml/2006/main">
             <a:r>
-              <a:t>Podpora: Nabídněte kartičky s nadpisy znám, mám a jsem; student pouze přesouvá připravené příklady.</a:t>
-            </a:r>
-          </a:p>
-          <a:p xmlns:a="http://schemas.openxmlformats.org/drawingml/2006/main">
-            <a:r>
-              <a:t>Rozšíření: Porovnejte SMS kód, autentizační aplikaci a bezpečnostní klíč z hlediska pohodlí, obnovy a odolnosti proti phishingu.</a:t>
+              <a:t>Podpora: Nabídni kartičky s nadpisy znám, mám a jsem; student pouze přesouvá připravené příklady.</a:t>
+            </a:r>
+          </a:p>
+          <a:p xmlns:a="http://schemas.openxmlformats.org/drawingml/2006/main">
+            <a:r>
+              <a:t>Rozšíření: Porovnej SMS kód, autentizační aplikaci a bezpečnostní klíč z hlediska pohodlí, obnovy a odolnosti proti phishingu.</a:t>
             </a:r>
           </a:p>
           <a:p xmlns:a="http://schemas.openxmlformats.org/drawingml/2006/main">
@@ -1093,7 +1093,7 @@
           </a:p>
           <a:p xmlns:a="http://schemas.openxmlformats.org/drawingml/2006/main">
             <a:r>
-              <a:t>Vyberte způsob odevzdání předem. Odpověď použijte jako diagnostiku pro začátek další hodiny; nehodnoťte pouze formální správnost, ale konkrétnost a zdůvodnění.</a:t>
+              <a:t>Vyber způsob odevzdání předem. Odpověď použij jako diagnostiku pro začátek další hodiny; nehodnoť pouze formální správnost, ale konkrétnost a zdůvodnění.</a:t>
             </a:r>
           </a:p>
         </p:txBody>

--- a/public/materialy/1L/7/Prezentace k hodinám/2. Hesla a dvoufaktorové ověření.pptx
+++ b/public/materialy/1L/7/Prezentace k hodinám/2. Hesla a dvoufaktorové ověření.pptx
@@ -6037,7 +6037,7 @@
               </a:defRPr>
             </a:pPr>
             <a:r>
-              <a:t>HODINA 2 · POSLEDNÍ 3 MINUTY</a:t>
+              <a:t>HODINA 2 · POSLEDNÍ 4 MINUTY</a:t>
             </a:r>
           </a:p>
         </p:txBody>

--- a/public/materialy/1L/7/Prezentace k hodinám/2. Hesla a dvoufaktorové ověření.pptx
+++ b/public/materialy/1L/7/Prezentace k hodinám/2. Hesla a dvoufaktorové ověření.pptx
@@ -543,22 +543,22 @@
           <a:lstStyle xmlns:a="http://schemas.openxmlformats.org/drawingml/2006/main"/>
           <a:p xmlns:a="http://schemas.openxmlformats.org/drawingml/2006/main">
             <a:r>
-              <a:t>Výukový cíl: Student vysvětlí význam unikátního hesla, rozliší faktory znám–mám–jsem a navrhne bezpečnou obnovu účtu.</a:t>
-            </a:r>
-          </a:p>
-          <a:p xmlns:a="http://schemas.openxmlformats.org/drawingml/2006/main">
-            <a:r>
-              <a:t>Soubory: Digitální pracovní sešit, 2. Účty a faktory ověření.csv</a:t>
-            </a:r>
-          </a:p>
-          <a:p xmlns:a="http://schemas.openxmlformats.org/drawingml/2006/main">
-            <a:r>
-              <a:t>Výstup: Model ochrany školního e-mailu, sociální sítě a herního účtu.</a:t>
-            </a:r>
-          </a:p>
-          <a:p xmlns:a="http://schemas.openxmlformats.org/drawingml/2006/main">
-            <a:r>
-              <a:t>Před otevřením dalšího snímku stručně uveď téma a nech studenty připravit pracovní soubory.</a:t>
+              <a:t>Výukový cíl: Student vysvětlí význam unikátního hesla, rozliší faktory znám–mám–jsem a navrhne bezpečnou obnovu účtu.</a:t>
+            </a:r>
+          </a:p>
+          <a:p xmlns:a="http://schemas.openxmlformats.org/drawingml/2006/main">
+            <a:r>
+              <a:t>Soubory: Digitální pracovní sešit, 2. Účty a faktory ověření.csv</a:t>
+            </a:r>
+          </a:p>
+          <a:p xmlns:a="http://schemas.openxmlformats.org/drawingml/2006/main">
+            <a:r>
+              <a:t>Výstup: Model ochrany školního e-mailu, sociální sítě a herního účtu.</a:t>
+            </a:r>
+          </a:p>
+          <a:p xmlns:a="http://schemas.openxmlformats.org/drawingml/2006/main">
+            <a:r>
+              <a:t>Před otevřením dalšího snímku stručně uveď téma a nech studenty připravit pracovní soubory.</a:t>
             </a:r>
           </a:p>
         </p:txBody>
@@ -643,7 +643,7 @@
           </a:p>
           <a:p xmlns:a="http://schemas.openxmlformats.org/drawingml/2006/main">
             <a:r>
-              <a:t>Otázka pro studenty: Jedno heslo uniklo. Kolik účtů je teď v ohrožení?</a:t>
+              <a:t>Otázka pro studenty: Jedno heslo uniklo. Kolik účtů je teď v ohrožení?</a:t>
             </a:r>
           </a:p>
           <a:p xmlns:a="http://schemas.openxmlformats.org/drawingml/2006/main">
@@ -723,22 +723,22 @@
           </a:p>
           <a:p xmlns:a="http://schemas.openxmlformats.org/drawingml/2006/main">
             <a:r>
-              <a:t>Činnost: Heslová fráze a správce hesel.</a:t>
-            </a:r>
-          </a:p>
-          <a:p xmlns:a="http://schemas.openxmlformats.org/drawingml/2006/main">
-            <a:r>
-              <a:t>Postup učitele: Zdůrazni délku, jedinečnost a nepředvídatelnost.</a:t>
-            </a:r>
-          </a:p>
-          <a:p xmlns:a="http://schemas.openxmlformats.org/drawingml/2006/main">
-            <a:r>
-              <a:t>Klíčové závěry: Silné heslo: Je dlouhé, unikátní a nepředvídatelné; nesmí být známým citátem ani osobním údajem. | Správce hesel: Pomáhá vytvářet a ukládat odlišná hesla; hlavní účet správce musí být dobře chráněn. | Faktor znám: Heslo a PIN.</a:t>
-            </a:r>
-          </a:p>
-          <a:p xmlns:a="http://schemas.openxmlformats.org/drawingml/2006/main">
-            <a:r>
-              <a:t>Nech studenty doplnit příklad ke každému bodu. Přechod k aktivitě proveď otázkou: Jak tyto tři body použijeme na dnešní soubor?</a:t>
+              <a:t>Činnost: Heslová fráze a správce hesel.</a:t>
+            </a:r>
+          </a:p>
+          <a:p xmlns:a="http://schemas.openxmlformats.org/drawingml/2006/main">
+            <a:r>
+              <a:t>Postup učitele: Zdůrazni délku, jedinečnost a nepředvídatelnost.</a:t>
+            </a:r>
+          </a:p>
+          <a:p xmlns:a="http://schemas.openxmlformats.org/drawingml/2006/main">
+            <a:r>
+              <a:t>Klíčové závěry: Silné heslo: Je dlouhé, unikátní a nepředvídatelné; nesmí být známým citátem ani osobním údajem. | Správce hesel: Pomáhá vytvářet a ukládat odlišná hesla; hlavní účet správce musí být dobře chráněn. | Faktor znám: Heslo a PIN.</a:t>
+            </a:r>
+          </a:p>
+          <a:p xmlns:a="http://schemas.openxmlformats.org/drawingml/2006/main">
+            <a:r>
+              <a:t>Nech studenty doplnit příklad ke každému bodu. Přechod k aktivitě proveď otázkou: Jak tyto tři body použijeme na dnešní soubor?</a:t>
             </a:r>
           </a:p>
         </p:txBody>
@@ -808,7 +808,7 @@
           <a:lstStyle xmlns:a="http://schemas.openxmlformats.org/drawingml/2006/main"/>
           <a:p xmlns:a="http://schemas.openxmlformats.org/drawingml/2006/main">
             <a:r>
-              <a:t>Hlavní aktivita využívá: Digitální pracovní sešit, 2. Účty a faktory ověření.csv</a:t>
+              <a:t>Hlavní aktivita využívá: Digitální pracovní sešit, 2. Účty a faktory ověření.csv</a:t>
             </a:r>
           </a:p>
           <a:p xmlns:a="http://schemas.openxmlformats.org/drawingml/2006/main">
@@ -818,22 +818,22 @@
           </a:p>
           <a:p xmlns:a="http://schemas.openxmlformats.org/drawingml/2006/main">
             <a:r>
-              <a:t>22–32 min – Třídění faktorů v CSV: Dvojice přiřazují znám–mám–jsem a obhajují sporné příklady.</a:t>
-            </a:r>
-          </a:p>
-          <a:p xmlns:a="http://schemas.openxmlformats.org/drawingml/2006/main">
-            <a:r>
-              <a:t>32–41 min – Návrh ochrany tří účtů: Požaduj přihlášení, druhý faktor i způsob obnovy.</a:t>
-            </a:r>
-          </a:p>
-          <a:p xmlns:a="http://schemas.openxmlformats.org/drawingml/2006/main">
-            <a:r>
-              <a:t>Požadovaný výstup: Model ochrany školního e-mailu, sociální sítě a herního účtu.</a:t>
-            </a:r>
-          </a:p>
-          <a:p xmlns:a="http://schemas.openxmlformats.org/drawingml/2006/main">
-            <a:r>
-              <a:t>Během práce nepřebírej myš za studenta. Pomáhej otázkami z dalšího snímku a žádej, aby každé rozhodnutí opřel o konkrétní znak nebo zdroj.</a:t>
+              <a:t>22–32 min – Třídění faktorů v CSV: Dvojice přiřazují znám–mám–jsem a obhajují sporné příklady.</a:t>
+            </a:r>
+          </a:p>
+          <a:p xmlns:a="http://schemas.openxmlformats.org/drawingml/2006/main">
+            <a:r>
+              <a:t>32–41 min – Návrh ochrany tří účtů: Požaduj přihlášení, druhý faktor i způsob obnovy.</a:t>
+            </a:r>
+          </a:p>
+          <a:p xmlns:a="http://schemas.openxmlformats.org/drawingml/2006/main">
+            <a:r>
+              <a:t>Požadovaný výstup: Model ochrany školního e-mailu, sociální sítě a herního účtu.</a:t>
+            </a:r>
+          </a:p>
+          <a:p xmlns:a="http://schemas.openxmlformats.org/drawingml/2006/main">
+            <a:r>
+              <a:t>Během práce nepřebírej myš za studenta. Pomáhej otázkami z dalšího snímku a žádej, aby každé rozhodnutí opřel o konkrétní znak nebo zdroj.</a:t>
             </a:r>
           </a:p>
         </p:txBody>
@@ -903,27 +903,27 @@
           <a:lstStyle xmlns:a="http://schemas.openxmlformats.org/drawingml/2006/main"/>
           <a:p xmlns:a="http://schemas.openxmlformats.org/drawingml/2006/main">
             <a:r>
-              <a:t>Kritérium úspěchu: Student správně roztřídí autentizační prvky a navrhne alespoň jednu skutečnou kombinaci 2FA.</a:t>
-            </a:r>
-          </a:p>
-          <a:p xmlns:a="http://schemas.openxmlformats.org/drawingml/2006/main">
-            <a:r>
-              <a:t>Vodicí otázky: Proč dvě tajné informace nemusí znamenat dva různé faktory? | Co se stane, když ztratíš telefon s autentizační aplikací? | Kde mají být záložní kódy, aby nebyly současně se ztraceným zařízením?</a:t>
-            </a:r>
-          </a:p>
-          <a:p xmlns:a="http://schemas.openxmlformats.org/drawingml/2006/main">
-            <a:r>
-              <a:t>Podpora: Nabídni kartičky s nadpisy znám, mám a jsem; student pouze přesouvá připravené příklady.</a:t>
-            </a:r>
-          </a:p>
-          <a:p xmlns:a="http://schemas.openxmlformats.org/drawingml/2006/main">
-            <a:r>
-              <a:t>Rozšíření: Porovnej SMS kód, autentizační aplikaci a bezpečnostní klíč z hlediska pohodlí, obnovy a odolnosti proti phishingu.</a:t>
-            </a:r>
-          </a:p>
-          <a:p xmlns:a="http://schemas.openxmlformats.org/drawingml/2006/main">
-            <a:r>
-              <a:t>Pro rychlou mezikontrolu nech dvojice vyměnit výstup a označit jeden dobře doložený bod a jednu otázku, která ještě zůstává.</a:t>
+              <a:t>Kritérium úspěchu: Student správně roztřídí autentizační prvky a navrhne alespoň jednu skutečnou kombinaci 2FA.</a:t>
+            </a:r>
+          </a:p>
+          <a:p xmlns:a="http://schemas.openxmlformats.org/drawingml/2006/main">
+            <a:r>
+              <a:t>Vodicí otázky: Proč dvě tajné informace nemusí znamenat dva různé faktory? | Co se stane, když ztratíš telefon s autentizační aplikací? | Kde mají být záložní kódy, aby nebyly současně se ztraceným zařízením?</a:t>
+            </a:r>
+          </a:p>
+          <a:p xmlns:a="http://schemas.openxmlformats.org/drawingml/2006/main">
+            <a:r>
+              <a:t>Podpora: Nabídni kartičky s nadpisy znám, mám a jsem; student pouze přesouvá připravené příklady.</a:t>
+            </a:r>
+          </a:p>
+          <a:p xmlns:a="http://schemas.openxmlformats.org/drawingml/2006/main">
+            <a:r>
+              <a:t>Rozšíření: Porovnej SMS kód, autentizační aplikaci a bezpečnostní klíč z hlediska pohodlí, obnovy a odolnosti proti phishingu.</a:t>
+            </a:r>
+          </a:p>
+          <a:p xmlns:a="http://schemas.openxmlformats.org/drawingml/2006/main">
+            <a:r>
+              <a:t>Pro rychlou mezikontrolu nech dvojice vyměnit výstup a označit jeden dobře doložený bod a jednu otázku, která ještě zůstává.</a:t>
             </a:r>
           </a:p>
         </p:txBody>
@@ -993,17 +993,17 @@
           <a:lstStyle xmlns:a="http://schemas.openxmlformats.org/drawingml/2006/main"/>
           <a:p xmlns:a="http://schemas.openxmlformats.org/drawingml/2006/main">
             <a:r>
-              <a:t>Očekávané závěry: Silné heslo: Je dlouhé, unikátní a nepředvídatelné; nesmí být známým citátem ani osobním údajem. | Správce hesel: Pomáhá vytvářet a ukládat odlišná hesla; hlavní účet správce musí být dobře chráněn. | Faktor znám: Heslo a PIN. | Faktor mám: Telefon s autentizační aplikací, bezpečnostní klíč nebo jiné držené zařízení. | Faktor jsem: Otisk prstu nebo jiná biometrie. | Obnova: Záložní kódy uložené odděleně, aktuální obnovovací údaje a známý postup poskytovatele.</a:t>
-            </a:r>
-          </a:p>
-          <a:p xmlns:a="http://schemas.openxmlformats.org/drawingml/2006/main">
-            <a:r>
-              <a:t>Časté chyby a intervence: „Heslo + PIN je 2FA.“ → Obojí patří do faktoru znám; pro 2FA je třeba odlišný typ faktoru. | „Biometrie je heslo, které lze změnit.“ → Biometrický údaj nelze jednoduše nahradit; zařízení obvykle ukládá jeho šablonu. | „Nejsilnější je co nejvíce znaků.“ → Délka nepomůže, pokud je heslo známé, opakované nebo předvídatelné.</a:t>
-            </a:r>
-          </a:p>
-          <a:p xmlns:a="http://schemas.openxmlformats.org/drawingml/2006/main">
-            <a:r>
-              <a:t>Nečti celý klíč. Vyber dva studentské postupy, které vedou k odlišným závěrům, a nech třídu určit, který je lépe podložený.</a:t>
+              <a:t>Očekávané závěry: Silné heslo: Je dlouhé, unikátní a nepředvídatelné; nesmí být známým citátem ani osobním údajem. | Správce hesel: Pomáhá vytvářet a ukládat odlišná hesla; hlavní účet správce musí být dobře chráněn. | Faktor znám: Heslo a PIN. | Faktor mám: Telefon s autentizační aplikací, bezpečnostní klíč nebo jiné držené zařízení. | Faktor jsem: Otisk prstu nebo jiná biometrie. | Obnova: Záložní kódy uložené odděleně, aktuální obnovovací údaje a známý postup poskytovatele.</a:t>
+            </a:r>
+          </a:p>
+          <a:p xmlns:a="http://schemas.openxmlformats.org/drawingml/2006/main">
+            <a:r>
+              <a:t>Časté chyby a intervence: „Heslo + PIN je 2FA.“ → Obojí patří do faktoru znám; pro 2FA je třeba odlišný typ faktoru. | „Biometrie je heslo, které lze změnit.“ → Biometrický údaj nelze jednoduše nahradit; zařízení obvykle ukládá jeho šablonu. | „Nejsilnější je co nejvíce znaků.“ → Délka nepomůže, pokud je heslo známé, opakované nebo předvídatelné.</a:t>
+            </a:r>
+          </a:p>
+          <a:p xmlns:a="http://schemas.openxmlformats.org/drawingml/2006/main">
+            <a:r>
+              <a:t>Nečti celý klíč. Vyber dva studentské postupy, které vedou k odlišným závěrům, a nech třídu určit, který je lépe podložený.</a:t>
             </a:r>
           </a:p>
         </p:txBody>
@@ -1073,27 +1073,27 @@
           <a:lstStyle xmlns:a="http://schemas.openxmlformats.org/drawingml/2006/main"/>
           <a:p xmlns:a="http://schemas.openxmlformats.org/drawingml/2006/main">
             <a:r>
-              <a:t>Exit ticket: Uveď jednu platnou dvojici 2FA a napiš, ke kterým dvěma faktorům patří.</a:t>
-            </a:r>
-          </a:p>
-          <a:p xmlns:a="http://schemas.openxmlformats.org/drawingml/2006/main">
-            <a:r>
-              <a:t>Podpora: Nabídni kartičky s nadpisy znám, mám a jsem; student pouze přesouvá připravené příklady.</a:t>
-            </a:r>
-          </a:p>
-          <a:p xmlns:a="http://schemas.openxmlformats.org/drawingml/2006/main">
-            <a:r>
-              <a:t>Rozšíření: Porovnej SMS kód, autentizační aplikaci a bezpečnostní klíč z hlediska pohodlí, obnovy a odolnosti proti phishingu.</a:t>
-            </a:r>
-          </a:p>
-          <a:p xmlns:a="http://schemas.openxmlformats.org/drawingml/2006/main">
-            <a:r>
-              <a:t>Když technika selže: CSV lze nahradit tříděním příkladů přímo v tabulce pracovního sešitu.</a:t>
-            </a:r>
-          </a:p>
-          <a:p xmlns:a="http://schemas.openxmlformats.org/drawingml/2006/main">
-            <a:r>
-              <a:t>Vyber způsob odevzdání předem. Odpověď použij jako diagnostiku pro začátek další hodiny; nehodnoť pouze formální správnost, ale konkrétnost a zdůvodnění.</a:t>
+              <a:t>Exit ticket: Uveď jednu platnou dvojici 2FA a napiš, ke kterým dvěma faktorům patří.</a:t>
+            </a:r>
+          </a:p>
+          <a:p xmlns:a="http://schemas.openxmlformats.org/drawingml/2006/main">
+            <a:r>
+              <a:t>Podpora: Nabídni kartičky s nadpisy znám, mám a jsem; student pouze přesouvá připravené příklady.</a:t>
+            </a:r>
+          </a:p>
+          <a:p xmlns:a="http://schemas.openxmlformats.org/drawingml/2006/main">
+            <a:r>
+              <a:t>Rozšíření: Porovnej SMS kód, autentizační aplikaci a bezpečnostní klíč z hlediska pohodlí, obnovy a odolnosti proti phishingu.</a:t>
+            </a:r>
+          </a:p>
+          <a:p xmlns:a="http://schemas.openxmlformats.org/drawingml/2006/main">
+            <a:r>
+              <a:t>Když technika selže: CSV lze nahradit tříděním příkladů přímo v tabulce pracovního sešitu.</a:t>
+            </a:r>
+          </a:p>
+          <a:p xmlns:a="http://schemas.openxmlformats.org/drawingml/2006/main">
+            <a:r>
+              <a:t>Vyber způsob odevzdání předem. Odpověď použij jako diagnostiku pro začátek další hodiny; nehodnoť pouze formální správnost, ale konkrétnost a zdůvodnění.</a:t>
             </a:r>
           </a:p>
         </p:txBody>
@@ -1824,7 +1824,7 @@
             </a:pPr>
             <a:r>
               <a:t>INTERNET, BEZPEČNOST
-A PRÁCE S INFORMACEMI</a:t>
+A PRÁCE S INFORMACEMI</a:t>
             </a:r>
           </a:p>
         </p:txBody>
@@ -1869,7 +1869,7 @@
               </a:defRPr>
             </a:pPr>
             <a:r>
-              <a:t>Hesla, přihlašování a dvoufaktorové ověření</a:t>
+              <a:t>Hesla, přihlašování a dvoufaktorové ověření</a:t>
             </a:r>
           </a:p>
         </p:txBody>
@@ -1914,7 +1914,7 @@
               </a:defRPr>
             </a:pPr>
             <a:r>
-              <a:t>Student vysvětlí význam unikátního hesla, rozliší faktory znám–mám–jsem a navrhne bezpečnou obnovu účtu.</a:t>
+              <a:t>Student vysvětlí význam unikátního hesla, rozliší faktory znám–mám–jsem a navrhne bezpečnou obnovu účtu.</a:t>
             </a:r>
           </a:p>
         </p:txBody>
@@ -2322,7 +2322,7 @@
               </a:defRPr>
             </a:pPr>
             <a:r>
-              <a:t>Jedno heslo uniklo. Kolik účtů je teď v ohrožení?</a:t>
+              <a:t>Jedno heslo uniklo. Kolik účtů je teď v ohrožení?</a:t>
             </a:r>
           </a:p>
         </p:txBody>
@@ -3133,7 +3133,7 @@
               </a:defRPr>
             </a:pPr>
             <a:r>
-              <a:t>Kombinuj dva různé typy: něco, co znám, s něčím, co mám nebo čím jsem.</a:t>
+              <a:t>Kombinuj dva různé typy: něco, co znám, s něčím, co mám nebo čím jsem.</a:t>
             </a:r>
           </a:p>
         </p:txBody>
@@ -3268,7 +3268,7 @@
               </a:defRPr>
             </a:pPr>
             <a:r>
-              <a:t>Záložní kódy a obnovovací údaje ulož odděleně od zařízení, které můžeš ztratit.</a:t>
+              <a:t>Záložní kódy a obnovovací údaje ulož odděleně od zařízení, které můžeš ztratit.</a:t>
             </a:r>
           </a:p>
         </p:txBody>
@@ -3344,7 +3344,7 @@
               </a:defRPr>
             </a:pPr>
             <a:r>
-              <a:t>Nejde o rychlý tip. Jde o postup, který lze vysvětlit a zopakovat.</a:t>
+              <a:t>Nejde o rychlý tip. Jde o postup, který lze vysvětlit a zopakovat.</a:t>
             </a:r>
           </a:p>
         </p:txBody>
@@ -3674,7 +3674,7 @@
               </a:defRPr>
             </a:pPr>
             <a:r>
-              <a:t>Digitální pracovní sešit, 2. Účty a faktory ověření.csv</a:t>
+              <a:t>Digitální pracovní sešit, 2. Účty a faktory ověření.csv</a:t>
             </a:r>
           </a:p>
         </p:txBody>
@@ -3840,7 +3840,7 @@
               </a:defRPr>
             </a:pPr>
             <a:r>
-              <a:t>Nehodnoť je jen podle speciálních znaků. Sleduj délku, jedinečnost a předvídatelnost.</a:t>
+              <a:t>Nehodnoť je jen podle speciálních znaků. Sleduj délku, jedinečnost a předvídatelnost.</a:t>
             </a:r>
           </a:p>
         </p:txBody>
@@ -4006,7 +4006,7 @@
               </a:defRPr>
             </a:pPr>
             <a:r>
-              <a:t>Přiřaď prvky ke znám – mám – jsem a obhaj sporné příklady.</a:t>
+              <a:t>Přiřaď prvky ke znám – mám – jsem a obhaj sporné příklady.</a:t>
             </a:r>
           </a:p>
         </p:txBody>
@@ -4172,7 +4172,7 @@
               </a:defRPr>
             </a:pPr>
             <a:r>
-              <a:t>U e-mailu, sociální sítě a hry doplň heslo, druhý faktor i způsob obnovy.</a:t>
+              <a:t>U e-mailu, sociální sítě a hry doplň heslo, druhý faktor i způsob obnovy.</a:t>
             </a:r>
           </a:p>
         </p:txBody>
@@ -4262,7 +4262,7 @@
               </a:defRPr>
             </a:pPr>
             <a:r>
-              <a:t>Model ochrany školního e-mailu, sociální sítě a herního účtu.</a:t>
+              <a:t>Model ochrany školního e-mailu, sociální sítě a herního účtu.</a:t>
             </a:r>
           </a:p>
         </p:txBody>
@@ -4668,7 +4668,7 @@
               </a:defRPr>
             </a:pPr>
             <a:r>
-              <a:t>Student správně roztřídí autentizační prvky a navrhne alespoň jednu skutečnou kombinaci 2FA.</a:t>
+              <a:t>Student správně roztřídí autentizační prvky a navrhne alespoň jednu skutečnou kombinaci 2FA.</a:t>
             </a:r>
           </a:p>
         </p:txBody>
@@ -5000,7 +5000,7 @@
               </a:defRPr>
             </a:pPr>
             <a:r>
-              <a:t>Co se stane, když ztratíš telefon s autentizační aplikací?</a:t>
+              <a:t>Co se stane, když ztratíš telefon s autentizační aplikací?</a:t>
             </a:r>
           </a:p>
         </p:txBody>
@@ -5541,7 +5541,7 @@
               </a:defRPr>
             </a:pPr>
             <a:r>
-              <a:t>Je dlouhé, unikátní a nepředvídatelné; nesmí být známým citátem ani osobním údajem.</a:t>
+              <a:t>Je dlouhé, unikátní a nepředvídatelné; nesmí být známým citátem ani osobním údajem.</a:t>
             </a:r>
           </a:p>
         </p:txBody>
@@ -5631,7 +5631,7 @@
               </a:defRPr>
             </a:pPr>
             <a:r>
-              <a:t>Pomáhá vytvářet a ukládat odlišná hesla; hlavní účet správce musí být dobře chráněn.</a:t>
+              <a:t>Pomáhá vytvářet a ukládat odlišná hesla; hlavní účet správce musí být dobře chráněn.</a:t>
             </a:r>
           </a:p>
         </p:txBody>
@@ -5721,7 +5721,7 @@
               </a:defRPr>
             </a:pPr>
             <a:r>
-              <a:t>Heslo a PIN.</a:t>
+              <a:t>Heslo a PIN.</a:t>
             </a:r>
           </a:p>
         </p:txBody>
@@ -5932,7 +5932,7 @@
               </a:defRPr>
             </a:pPr>
             <a:r>
-              <a:t>Vrať se k úvodnímu rozhodnutí. Co bys teď změnil — a proč?</a:t>
+              <a:t>Vrať se k úvodnímu rozhodnutí. Co bys teď změnil — a proč?</a:t>
             </a:r>
           </a:p>
         </p:txBody>
@@ -6127,7 +6127,7 @@
               </a:defRPr>
             </a:pPr>
             <a:r>
-              <a:t>Uveď jednu platnou dvojici 2FA a napiš, ke kterým dvěma faktorům patří.</a:t>
+              <a:t>Uveď jednu platnou dvojici 2FA a napiš, ke kterým dvěma faktorům patří.</a:t>
             </a:r>
           </a:p>
         </p:txBody>
